--- a/en/slides/01-Computer_Architecture-PRG32_and_PRG32-QT_Setup-Lab.pptx
+++ b/en/slides/01-Computer_Architecture-PRG32_and_PRG32-QT_Setup-Lab.pptx
@@ -134,13 +134,13 @@
   <p:extLst>
     <p:ext uri="{521415D9-36F7-43E2-AB2F-B90AF26B5E84}">
       <p14:sectionLst xmlns:p14="http://schemas.microsoft.com/office/powerpoint/2010/main">
-        <p14:section name="Opening" id="{0bfabcdb-5393-c5bc-c74b-30fef51fed7a}">
+        <p14:section name="Opening" id="{e621016a-6593-ed91-2d08-8ee7b864be28}">
           <p14:sldIdLst>
             <p14:sldId id="256"/>
             <p14:sldId id="257"/>
           </p14:sldIdLst>
         </p14:section>
-        <p14:section name="Step 1: install PRG32-QT" id="{ac5bf12e-200a-3865-5c6d-9236bf367c3d}">
+        <p14:section name="Step 1: install PRG32-QT" id="{78705986-6a48-9869-5cd6-53d853b69f01}">
           <p14:sldIdLst>
             <p14:sldId id="258"/>
             <p14:sldId id="259"/>
@@ -150,7 +150,7 @@
             <p14:sldId id="263"/>
           </p14:sldIdLst>
         </p14:section>
-        <p14:section name="Step 2: install the toolchain" id="{0a1a4287-2248-4997-6b2c-a862c31c0bc2}">
+        <p14:section name="Step 2: install the toolchain" id="{2fc3abf4-dae2-8607-4012-b786d3b2e168}">
           <p14:sldIdLst>
             <p14:sldId id="264"/>
             <p14:sldId id="265"/>
@@ -159,7 +159,7 @@
             <p14:sldId id="268"/>
           </p14:sldIdLst>
         </p14:section>
-        <p14:section name="Step 3: your first build" id="{70ec6ba2-9dc0-3bf8-f554-25219a885774}">
+        <p14:section name="Step 3: your first build" id="{251aa2bd-09cc-74b2-c2b7-43dc5d8b230d}">
           <p14:sldIdLst>
             <p14:sldId id="269"/>
             <p14:sldId id="270"/>
@@ -167,20 +167,20 @@
             <p14:sldId id="272"/>
           </p14:sldIdLst>
         </p14:section>
-        <p14:section name="Optional: QEMU and the kit" id="{6f2aaa1c-dec7-81e5-90d1-db6fec97bd01}">
+        <p14:section name="Optional: QEMU and the kit" id="{1bc5a182-b640-faff-1128-f0867f5b4dcc}">
           <p14:sldIdLst>
             <p14:sldId id="273"/>
             <p14:sldId id="274"/>
           </p14:sldIdLst>
         </p14:section>
-        <p14:section name="The complete program" id="{1e1b160e-2370-82f5-f4ec-f6906dd8d274}">
+        <p14:section name="The complete program" id="{ae0e4788-4c6e-070b-0a0f-df119cf5d707}">
           <p14:sldIdLst>
             <p14:sldId id="275"/>
             <p14:sldId id="276"/>
             <p14:sldId id="277"/>
           </p14:sldIdLst>
         </p14:section>
-        <p14:section name="Run it and test it" id="{5e0cace4-b16e-0f4a-ae0e-a32333d6507a}">
+        <p14:section name="Run it and test it" id="{1f05852d-ea23-3be4-2bd9-88216b48a55e}">
           <p14:sldIdLst>
             <p14:sldId id="278"/>
             <p14:sldId id="279"/>
@@ -189,7 +189,7 @@
             <p14:sldId id="282"/>
           </p14:sldIdLst>
         </p14:section>
-        <p14:section name="Exercises" id="{656f5cc4-55bd-33b7-2e1a-20c8f1e1b51f}">
+        <p14:section name="Exercises" id="{1c51a86b-224c-3d09-ce41-ce0826fd1d9c}">
           <p14:sldIdLst>
             <p14:sldId id="283"/>
           </p14:sldIdLst>
@@ -600,7 +600,7 @@
               <a:rPr lang="en-US" dirty="0"/>
               <a:t>This is the code deck of Lecture 01. Where the lecture deck develops the concepts, this deck contains everything that is written and executed: each listing with its commentary, the complete program of the lecture, the output it is expected to produce, and the procedure for testing it on each of the three hosts. The two decks are meant to be read together: the concepts explain the code, and the code gives the concepts an observable consequence.
 Learning status: UNDERSTAND NOW, by the end of this lecture you explain it, trace it and apply it on your own; USE NOW, you follow and use the recipe today; how it works inside is explained later, or is not part of the course; UNDERSTAND LATER, recognise the name and what it is for; a later lecture explains it. A slide without a badge is context: a story, an example, a question, an exercise.
-Learning status of this lecture. UNDERSTAND NOW: the pieces of PRG32. USE NOW: the PRG32 tools, the PRG32-QT debugger, the complete program (used, not studied, in this course). UNDERSTAND LATER: the init, update, draw contract (Lecture 02); registers (Lecture 02). A slide without a badge is context: a story, an example, a question, an exercise.</a:t>
+Learning status of this lecture. UNDERSTAND NOW: program, source and machine code; the pieces of PRG32. USE NOW: the terminal, the PRG32 tools, the PRG32-QT debugger, the complete program (used, not studied, in this course). UNDERSTAND LATER: the init, update, draw contract (Lecture 02); registers (Lecture 02). A slide without a badge is context: a story, an example, a question, an exercise.</a:t>
             </a:r>
             <a:endParaRPr lang="en-US" dirty="0"/>
           </a:p>
@@ -688,7 +688,7 @@
           <a:p>
             <a:r>
               <a:rPr lang="en-US" dirty="0"/>
-              <a:t>On macOS the procedure has three blocks. Homebrew installs the prerequisites. ESP-IDF is then cloned, and install.sh downloads the compilers for the two chips; this is the lengthy part. The line . ./export.sh begins with a dot followed by a space, and the dot is significant: it causes the script to modify the current shell, rather than a child process whose changes would vanish on exit. The final block clones PRG32 and runs the doctor. The same commands work on Apple Silicon and on Intel machines.
+              <a:t>On macOS the procedure has three blocks. Homebrew, a program that installs other programs from the terminal, installs the prerequisites. ESP-IDF is then cloned, and install.sh downloads the compilers for the two chips; this is the lengthy part. The line . ./export.sh begins with a dot followed by a space, and the dot is significant: it causes the script, a file of commands, to modify the current shell, the program that reads what is typed in the terminal, rather than a separate copy of it whose changes would vanish when it ends. The final block clones PRG32 and runs the doctor. The same commands work on Apple Silicon and on Intel machines.
 USE NOW: the PRG32 tools (used, not studied, in this course).
 For the lecturer: From the README of PRG32. git may first ask to install the Xcode command line tools: accept. The recursive clone and install.sh fetch a few gigabytes.</a:t>
             </a:r>
@@ -778,7 +778,7 @@
           <a:p>
             <a:r>
               <a:rPr lang="en-US" dirty="0"/>
-              <a:t>On Debian and Ubuntu the first block is a single long apt command, split across three lines by backslashes, and must be copied in full. Steps 2 and 3 are identical to those for macOS. Other distributions provide the same packages under different names. The last callout concerns only owners of a kit: to reach the board's serial port the user must belong to the group dialout, and the change takes effect only after logging out and in again.
+              <a:t>On Debian and Ubuntu the first block is a single long apt command, split across three lines by backslashes, and must be copied in full. Steps 2 and 3 are identical to those for macOS. Other distributions provide the same packages under different names. The last callout concerns only owners of a kit: to reach the board's serial port, the connection through the USB cable, the user must belong to the group dialout, the list of users allowed to use it, and the change takes effect only after logging out and in again.
 USE NOW: the PRG32 tools (used, not studied, in this course).
 For the lecturer: From the README of PRG32. The dialout group gives access to the serial port of the board: log out and in again after the command. It is not needed for PRG32-QT or QEMU.</a:t>
             </a:r>
@@ -868,7 +868,7 @@
           <a:p>
             <a:r>
               <a:rPr lang="en-US" dirty="0"/>
-              <a:t>This slide describes the daily routine and forestalls the most common error of the first weeks. In every new terminal, before anything else, ESP-IDF is activated with export.sh and the working directory set to the PRG32 folder. Two aliases reduce typing: get_idf performs the activation, and prg abbreviates python3 -m prg32. On Windows, opening ESP-IDF PowerShell achieves the same. The error is worth provoking once on purpose, by running the doctor in a fresh terminal without activation: having seen the message here, one recognises it immediately thereafter.
+              <a:t>This slide describes the daily routine and forestalls the most common error of the first weeks. In every new terminal, before anything else, ESP-IDF is activated with export.sh and the working directory set to the PRG32 folder. Two aliases, short names that stand for longer commands, reduce typing: get_idf performs the activation, and prg abbreviates python3 -m prg32. On Windows, opening ESP-IDF PowerShell achieves the same. The error is worth provoking once on purpose, by running the doctor in a fresh terminal without activation: having seen the message here, one recognises it immediately thereafter.
 USE NOW: the PRG32 tools (used, not studied, in this course).
 For the lecturer: The single most common mistake of the first weeks. Make the students close the terminal, open a new one and run doctor without activating: they must see the error once, here, and not during a tutorial.</a:t>
             </a:r>
@@ -1048,7 +1048,7 @@
           <a:p>
             <a:r>
               <a:rPr lang="en-US" dirty="0"/>
-              <a:t>The command cartridge build takes a source file and produces a .prg32 file. Three options merit understanding. --entry-prefix pong_c is the name that precedes _init, _update and _draw in the source, and thus identifies the three entry points. --portable produces a cartridge that runs on every host rather than on a single firmware image. --out names the output file. The tool reports the size of the code: a complete game of Pong occupies about three thousand bytes. The source is a C example from the repository, chosen so that the compiler can be tested before any program has been written.
+              <a:t>The command cartridge build takes a source file and produces a .prg32 file. Three options, the words beginning with -- that adjust what a command does, merit understanding. --entry-prefix pong_c is the name that precedes _init, _update and _draw in the source, and thus identifies the three entry points. --portable produces a cartridge that runs on every host rather than on a single firmware image. --out names the output file. The tool reports the size of the code: a complete game of Pong occupies about three thousand bytes. The source is a C example from the repository, chosen so that the compiler can be tested before any program has been written.
 USE NOW: the PRG32 tools (used, not studied, in this course). UNDERSTAND LATER: the init, update, draw contract (studied in Lecture 02).
 For the lecturer: Pong in C from the examples of the repository: it proves that the compiler works without typing a program. In Lecture 02 the source is yours, in assembly, and the command is the same. On Windows write python and put the command on one line.</a:t>
             </a:r>
@@ -1138,7 +1138,7 @@
           <a:p>
             <a:r>
               <a:rPr lang="en-US" dirty="0"/>
-              <a:t>PRG32-QT must be running. The first command, runtime, queries its state; a reply confirms that the connection works. The second, upload-and-run, stores the cartridge in slot cart0 and starts it, and the game appears in the PRG32-QT window. The command names the esp32c6 because, from the tool's point of view, PRG32-QT behaves as a board listening on port 8080. The same command, addressed to http://192.168.4.1, sends the game to a physical board. Without the tools, the file can also be imported from the PRG32-QT menu.
+              <a:t>PRG32-QT must be running. The first command, runtime, queries its state; a reply confirms that the connection works. The second, upload-and-run, stores the cartridge in slot cart0 and starts it, and the game appears in the PRG32-QT window. The command names the esp32c6 because, from the tool's point of view, PRG32-QT behaves as a board listening on port 8080. The same command, addressed to http://192.168.4.1, the network address of the board on its own Wi-Fi network, sends the game to a physical board. Without the tools, the file can also be imported from the PRG32-QT menu.
 USE NOW: the PRG32 tools (used, not studied, in this course).
 For the lecturer: Run for these slides on macOS. If localhost does not answer, read the address on the Setup screen of PRG32-QT and use it. Without the tools: in PRG32-QT import the file pong.prg32 and choose Run Cartridge. The same command with --url http://192.168.4.1 sends the game to a real board.</a:t>
             </a:r>
@@ -2485,7 +2485,7 @@
           <a:p>
             <a:r>
               <a:rPr lang="en-US" dirty="0"/>
-              <a:t>The student locates the row corresponding to their operating system and downloads that file from the Releases page of the PRG32-QT repository, always choosing the latest release. Windows is served by an installer, macOS by a disk image (one for Apple Silicon and one for Intel processors), Linux and Raspberry Pi OS by a Debian package. The version number 0.4.1 is that of October 2026; it may since have increased, but file names follow the same pattern. The slide on macOS explains how to determine which processor a Mac contains.
+              <a:t>The student locates the row corresponding to their operating system and downloads that file from the Releases page of the PRG32-QT repository, always choosing the latest release. Windows is served by an installer, macOS by a disk image (one for Apple Silicon and one for Intel processors), Linux and Raspberry Pi OS by a Debian package. All three are ways of delivering an application: a file that, once opened, copies the program into the right place on the computer. The version number 0.4.1 is that of October 2026; it may since have increased, but file names follow the same pattern. The slide on macOS explains how to determine which processor a Mac contains.
 USE NOW: the PRG32 tools (used, not studied, in this course).
 For the lecturer: From github.com/riscv-prg32/PRG32-QT, Releases, the latest one. 0.4.1 is the version of October 2026: the file names follow this pattern with the current number. The file SHA256SUMS-platforms.txt lists the checksums. Android and Android TV packages are on the same page.</a:t>
             </a:r>
@@ -2575,7 +2575,7 @@
           <a:p>
             <a:r>
               <a:rPr lang="en-US" dirty="0"/>
-              <a:t>On Windows the installation consists of four actions: download the Setup file, run it, accept the proposed folder, and start PRG32 from the Start menu. Two warnings may appear, and both are expected. SmartScreen may display a blue dialogue because the installer does not come from the Microsoft Store; the remedy is More info, then Run anyway. The firewall may request permission, which should be granted for private networks: PRG32-QT listens on port 8080 to receive cartridges from the tools, a facility used in step 3.
+              <a:t>On Windows the installation consists of four actions: download the Setup file, run it, accept the proposed folder, and start PRG32 from the Start menu. Two warnings may appear, and both are expected. SmartScreen may display a blue dialogue because the installer does not come from the Microsoft Store; the remedy is More info, then Run anyway. The firewall, the part of the system that decides which programs may receive connections from the network, may request permission, which should be granted for private networks: PRG32-QT listens on port 8080 to receive cartridges from the tools, a facility used in step 3.
 USE NOW: the PRG32 tools (used, not studied, in this course).
 For the lecturer: The installer contains the Qt libraries and the compiler runtime: nothing else has to be installed. The firewall question appears because PRG32-QT listens on port 8080 for cartridges sent by the tools: step 3 uses it.</a:t>
             </a:r>
@@ -2755,7 +2755,7 @@
           <a:p>
             <a:r>
               <a:rPr lang="en-US" dirty="0"/>
-              <a:t>On Linux the upper half of the listing installs the package: apt install with ./ preceding the file name installs that file together with its dependencies, and the program is then available as /usr/bin/PRG32. The requirement to verify is Qt 6.5 or later, which Debian 13 and Ubuntu 25.04 satisfy and Ubuntu 24.04 does not. The lower half is the alternative for older systems: building from source with the script provided in the repository. Lines beginning with # are comments and are not to be typed.
+              <a:t>On Linux the upper half of the listing installs the package: apt install with ./ preceding the file name installs that file together with its dependencies, the other software it needs in order to run, and the program is then available as /usr/bin/PRG32. The requirement to verify is Qt 6.5 or later (Qt is the library of ready-made windows, buttons and graphics on which PRG32-QT is built), which Debian 13 and Ubuntu 25.04 satisfy and Ubuntu 24.04 does not. The lower half is the alternative for older systems: building from source with the script provided in the repository. Lines beginning with # are comments and are not to be typed.
 USE NOW: the PRG32 tools (used, not studied, in this course).
 For the lecturer: The package depends on the Qt 6 QML, Multimedia and WebSockets packages of the distribution. Where the system Qt is older than 6.5, install Qt with the online installer of qt.io and build with it. On Raspberry Pi OS use the ARM64 package, or scripts/build-raspbian.sh.</a:t>
             </a:r>
@@ -3023,7 +3023,7 @@
           <a:p>
             <a:r>
               <a:rPr lang="en-US" dirty="0"/>
-              <a:t>On Windows the first three steps use graphical installers: Git, Python, and the ESP-IDF Tools Installer, in which a release 5.4 or later and the targets esp32c3 and esp32c6 are selected. The installer creates a shortcut named ESP-IDF PowerShell; all work must be done in that window and never in a plain terminal, because only there is the environment activated. The five commands that follow clone the PRG32 repository, install two Python packages and run the doctor. On Windows the interpreter is invoked as python, not python3.
+              <a:t>On Windows the first three steps use graphical installers: Git, the program that copies and tracks repositories; Python, a programming language in which the PRG32 tools are written; and the ESP-IDF Tools Installer, in which a release 5.4 or later and the targets esp32c3 and esp32c6 are selected. The installer creates a shortcut named ESP-IDF PowerShell; all work must be done in that window and never in a plain terminal, because only there is the environment activated: the settings that tell the terminal where the compiler and its tools are. The five commands that follow clone the PRG32 repository, that is, copy it onto the laptop, install two Python packages (libraries that the tools need) and run the doctor, a command that checks the installation. On Windows the interpreter is invoked as python, not python3.
 USE NOW: the PRG32 tools (used, not studied, in this course).
 For the lecturer: From the README of PRG32. An alternative for those who prefer an editor: Visual Studio Code with the Espressif ESP-IDF extension, which installs the same toolchain. Avoid folders with spaces or accented letters in their path: old build tools do not like them.</a:t>
             </a:r>

--- a/en/slides/01-Computer_Architecture-PRG32_and_PRG32-QT_Setup-Lab.pptx
+++ b/en/slides/01-Computer_Architecture-PRG32_and_PRG32-QT_Setup-Lab.pptx
@@ -134,13 +134,13 @@
   <p:extLst>
     <p:ext uri="{521415D9-36F7-43E2-AB2F-B90AF26B5E84}">
       <p14:sectionLst xmlns:p14="http://schemas.microsoft.com/office/powerpoint/2010/main">
-        <p14:section name="Opening" id="{e621016a-6593-ed91-2d08-8ee7b864be28}">
+        <p14:section name="Opening" id="{19fc13e0-71b2-7bb6-f679-1c705867919c}">
           <p14:sldIdLst>
             <p14:sldId id="256"/>
             <p14:sldId id="257"/>
           </p14:sldIdLst>
         </p14:section>
-        <p14:section name="Step 1: install PRG32-QT" id="{78705986-6a48-9869-5cd6-53d853b69f01}">
+        <p14:section name="Step 1: install PRG32-QT" id="{536cd291-0562-5414-3d80-45596521b7b9}">
           <p14:sldIdLst>
             <p14:sldId id="258"/>
             <p14:sldId id="259"/>
@@ -150,7 +150,7 @@
             <p14:sldId id="263"/>
           </p14:sldIdLst>
         </p14:section>
-        <p14:section name="Step 2: install the toolchain" id="{2fc3abf4-dae2-8607-4012-b786d3b2e168}">
+        <p14:section name="Step 2: install the toolchain" id="{b27a682f-26e7-34e9-e44e-157b694d6ac6}">
           <p14:sldIdLst>
             <p14:sldId id="264"/>
             <p14:sldId id="265"/>
@@ -159,7 +159,7 @@
             <p14:sldId id="268"/>
           </p14:sldIdLst>
         </p14:section>
-        <p14:section name="Step 3: your first build" id="{251aa2bd-09cc-74b2-c2b7-43dc5d8b230d}">
+        <p14:section name="Step 3: your first build" id="{8c7c22bb-309e-7204-ac10-b458b55ef887}">
           <p14:sldIdLst>
             <p14:sldId id="269"/>
             <p14:sldId id="270"/>
@@ -167,20 +167,20 @@
             <p14:sldId id="272"/>
           </p14:sldIdLst>
         </p14:section>
-        <p14:section name="Optional: QEMU and the kit" id="{1bc5a182-b640-faff-1128-f0867f5b4dcc}">
+        <p14:section name="Optional: QEMU and the kit" id="{e24f1c80-a1a2-3f45-ce0f-6e1445d9e69a}">
           <p14:sldIdLst>
             <p14:sldId id="273"/>
             <p14:sldId id="274"/>
           </p14:sldIdLst>
         </p14:section>
-        <p14:section name="The complete program" id="{ae0e4788-4c6e-070b-0a0f-df119cf5d707}">
+        <p14:section name="The complete program" id="{51766412-0028-1748-225d-4dc8af01741a}">
           <p14:sldIdLst>
             <p14:sldId id="275"/>
             <p14:sldId id="276"/>
             <p14:sldId id="277"/>
           </p14:sldIdLst>
         </p14:section>
-        <p14:section name="Run it and test it" id="{1f05852d-ea23-3be4-2bd9-88216b48a55e}">
+        <p14:section name="Run it and test it" id="{60c21d63-18c0-199f-195a-c2552c6056ab}">
           <p14:sldIdLst>
             <p14:sldId id="278"/>
             <p14:sldId id="279"/>
@@ -189,7 +189,7 @@
             <p14:sldId id="282"/>
           </p14:sldIdLst>
         </p14:section>
-        <p14:section name="Exercises" id="{1c51a86b-224c-3d09-ce41-ce0826fd1d9c}">
+        <p14:section name="Exercises" id="{069e84ac-64b7-1150-d664-1e560033f944}">
           <p14:sldIdLst>
             <p14:sldId id="283"/>
           </p14:sldIdLst>
@@ -600,7 +600,8 @@
               <a:rPr lang="en-US" dirty="0"/>
               <a:t>This is the code deck of Lecture 01. Where the lecture deck develops the concepts, this deck contains everything that is written and executed: each listing with its commentary, the complete program of the lecture, the output it is expected to produce, and the procedure for testing it on each of the three hosts. The two decks are meant to be read together: the concepts explain the code, and the code gives the concepts an observable consequence.
 Learning status: UNDERSTAND NOW, by the end of this lecture you explain it, trace it and apply it on your own; USE NOW, you follow and use the recipe today; how it works inside is explained later, or is not part of the course; UNDERSTAND LATER, recognise the name and what it is for; a later lecture explains it. A slide without a badge is context: a story, an example, a question, an exercise.
-Learning status of this lecture. UNDERSTAND NOW: program, source and machine code; the pieces of PRG32. USE NOW: the terminal, the PRG32 tools, the PRG32-QT debugger, the complete program (used, not studied, in this course). UNDERSTAND LATER: the init, update, draw contract (Lecture 02); registers (Lecture 02). A slide without a badge is context: a story, an example, a question, an exercise.</a:t>
+Learning status of this lecture. UNDERSTAND NOW: program, source and machine code; the pieces of PRG32. USE NOW: the terminal, the PRG32 tools, the PRG32-QT debugger, the complete program (used, not studied, in this course). UNDERSTAND LATER: the init, update, draw contract (Lecture 02); registers (Lecture 02). A slide without a badge is context: a story, an example, a question, an exercise.
+Roadmap. Today's outcomes: (1) explain the path from a source file to a running cartridge: source, translator, machine code, cartridge, host; (2) run a cartridge in PRG32-QT and build one with the terminal. Builds on: Lecture 00, and Starting from Zero for a reader who has never programmed. Next: Lecture 02, First Contact: RISC-V Assembly on PRG32.</a:t>
             </a:r>
             <a:endParaRPr lang="en-US" dirty="0"/>
           </a:p>
